--- a/MizanPro_Crack_Workshop.pptx
+++ b/MizanPro_Crack_Workshop.pptx
@@ -1009,7 +1009,7 @@
           <a:lstStyle/>
           <a:p>
             <a:r>
-              <a:t>اطبع هذه الشريحة (A5) وضعها أمام من يدير الشاشة. قبل الصعود: `reset-license.bat`، تشغيل التطبيق مرة، خروج من مجلد x32dbg، إيقاف AV اللحظي، دقة 1920×1080، تكبير x64dbg إلى 12pt.</a:t>
+              <a:t>اطبع هذه الشريحة (A5) وضعها أمام من يدير الشاشة. قبل الصعود: reset-license.bat، تشغيل التطبيق مرة، خروج من مجلد x32dbg، إيقاف AV اللحظي، دقة 1920×1080، تكبير x64dbg إلى 12pt.</a:t>
             </a:r>
           </a:p>
         </p:txBody>
@@ -1569,7 +1569,7 @@
           <a:lstStyle/>
           <a:p>
             <a:r>
-              <a:t>أكّد على الفرق: في الطبقة الأولى نرضي الحساب، هنا **نتجاوز الحساب** لأن مصدر الثقة خارجي وقابل للكتابة. اسأل: «كيف تمنعون هذا في مشروعكم؟» ← الجواب في شريحة الدفاع.</a:t>
+              <a:t>أكّد على الفرق: في الطبقة الأولى نرضي الحساب، هنا نتجاوز الحساب لأن مصدر الثقة خارجي وقابل للكتابة. اسأل: «كيف تمنعون هذا في مشروعكم؟» ← الجواب في شريحة الدفاع.</a:t>
             </a:r>
           </a:p>
         </p:txBody>
@@ -1639,7 +1639,7 @@
           <a:lstStyle/>
           <a:p>
             <a:r>
-              <a:t>الخطوات الست الأولى تُنفَّذ في 40 ثانية. إن لم تظهر نتيجة للبحث: لا تتردد — قفز إلى الخطة B (الرتق على القرص بـ HxD، شريحة 11). المفتاح الذي ستلصقه: `5NOFK-JQB1Z-7HSHF-NOP6D`.</a:t>
+              <a:t>الخطوات الست الأولى تُنفَّذ في 40 ثانية. إن لم تظهر نتيجة للبحث: لا تتردد — قفز إلى الخطة B (الرتق على القرص بـ HxD، شريحة 11). المفتاح الذي ستلصقه: 5NOFK-JQB1Z-7HSHF-NOP6D.</a:t>
             </a:r>
           </a:p>
         </p:txBody>
@@ -5154,7 +5154,7 @@
                 <a:solidFill>
                   <a:srgbClr val="8A5F0A"/>
                 </a:solidFill>
-                <a:latin typeface="Consolas"/>
+                <a:latin typeface="Segoe UI"/>
               </a:rPr>
               <a:t>MizanPro.exe</a:t>
             </a:r>
@@ -5697,7 +5697,7 @@
                 <a:solidFill>
                   <a:srgbClr val="8A5F0A"/>
                 </a:solidFill>
-                <a:latin typeface="Consolas"/>
+                <a:latin typeface="Segoe UI"/>
               </a:rPr>
               <a:t>ParseAndVerify</a:t>
             </a:r>
@@ -5972,7 +5972,7 @@
                 </a:solidFill>
                 <a:latin typeface="Segoe UI"/>
               </a:rPr>
-              <a:t>شغّل `DOTNET_TieredCompilation=0` أثناء البروفة لتثبيت العناوين</a:t>
+              <a:t>شغّل DOTNET_TieredCompilation=0 أثناء البروفة لتثبيت العناوين</a:t>
             </a:r>
           </a:p>
         </p:txBody>
@@ -6394,7 +6394,7 @@
                 <a:solidFill>
                   <a:srgbClr val="8A5F0A"/>
                 </a:solidFill>
-                <a:latin typeface="Consolas"/>
+                <a:latin typeface="Segoe UI"/>
               </a:rPr>
               <a:t>InstallDate = 20250101</a:t>
             </a:r>
@@ -6422,7 +6422,7 @@
                 <a:solidFill>
                   <a:srgbClr val="8A5F0A"/>
                 </a:solidFill>
-                <a:latin typeface="Consolas"/>
+                <a:latin typeface="Segoe UI"/>
               </a:rPr>
               <a:t>bp user32.MessageBoxW</a:t>
             </a:r>
@@ -6486,7 +6486,7 @@
                 <a:solidFill>
                   <a:srgbClr val="8A5F0A"/>
                 </a:solidFill>
-                <a:latin typeface="Consolas"/>
+                <a:latin typeface="Segoe UI"/>
               </a:rPr>
               <a:t>user32</a:t>
             </a:r>
@@ -6504,7 +6504,7 @@
                 <a:solidFill>
                   <a:srgbClr val="8A5F0A"/>
                 </a:solidFill>
-                <a:latin typeface="Consolas"/>
+                <a:latin typeface="Segoe UI"/>
               </a:rPr>
               <a:t>coreclr.dll</a:t>
             </a:r>
@@ -6522,7 +6522,7 @@
                 <a:solidFill>
                   <a:srgbClr val="8A5F0A"/>
                 </a:solidFill>
-                <a:latin typeface="Consolas"/>
+                <a:latin typeface="Segoe UI"/>
               </a:rPr>
               <a:t>clrjit.dll</a:t>
             </a:r>
@@ -6559,7 +6559,7 @@
                 <a:solidFill>
                   <a:srgbClr val="8A5F0A"/>
                 </a:solidFill>
-                <a:latin typeface="Consolas"/>
+                <a:latin typeface="Segoe UI"/>
               </a:rPr>
               <a:t>EAX = 1</a:t>
             </a:r>
@@ -6592,20 +6592,29 @@
               <a:t>•  </a:t>
             </a:r>
             <a:r>
+              <a:rPr sz="1300" b="1" lang="ar-SA" algn="r">
+                <a:solidFill>
+                  <a:srgbClr val="1A202A"/>
+                </a:solidFill>
+                <a:latin typeface="Segoe UI"/>
+              </a:rPr>
+              <a:t>النتيجة: لا شيء يتغيّر</a:t>
+            </a:r>
+            <a:r>
               <a:rPr sz="1300" b="0" lang="ar-SA" algn="r">
                 <a:solidFill>
                   <a:srgbClr val="1A202A"/>
                 </a:solidFill>
                 <a:latin typeface="Segoe UI"/>
               </a:rPr>
-              <a:t>**النتيجة: لا شيء يتغيّر** — لأن </a:t>
+              <a:t> — لأن </a:t>
             </a:r>
             <a:r>
               <a:rPr sz="1300" b="1" lang="ar-SA" algn="r">
                 <a:solidFill>
                   <a:srgbClr val="8A5F0A"/>
                 </a:solidFill>
-                <a:latin typeface="Consolas"/>
+                <a:latin typeface="Segoe UI"/>
               </a:rPr>
               <a:t>App.xaml.cs</a:t>
             </a:r>
@@ -6940,7 +6949,25 @@
                 </a:solidFill>
                 <a:latin typeface="Segoe UI"/>
               </a:rPr>
-              <a:t>رتق القرص يبقى سارياً فقط لأن المشروع **غير موقّع (Strong Name)** ولا يفحص تكامله — وهذان أول توصيتين في صفحة الدفاع.</a:t>
+              <a:t>رتق القرص يبقى سارياً فقط لأن المشروع </a:t>
+            </a:r>
+            <a:r>
+              <a:rPr sz="1500" b="1" lang="ar-SA" algn="r">
+                <a:solidFill>
+                  <a:srgbClr val="1A202A"/>
+                </a:solidFill>
+                <a:latin typeface="Segoe UI"/>
+              </a:rPr>
+              <a:t>غير موقّع (Strong Name)</a:t>
+            </a:r>
+            <a:r>
+              <a:rPr sz="1500" b="0" lang="ar-SA" algn="r">
+                <a:solidFill>
+                  <a:srgbClr val="1A202A"/>
+                </a:solidFill>
+                <a:latin typeface="Segoe UI"/>
+              </a:rPr>
+              <a:t> ولا يفحص تكامله — وهذان أول توصيتين في صفحة الدفاع.</a:t>
             </a:r>
           </a:p>
         </p:txBody>
@@ -7462,7 +7489,7 @@
                 <a:solidFill>
                   <a:srgbClr val="8A5F0A"/>
                 </a:solidFill>
-                <a:latin typeface="Consolas"/>
+                <a:latin typeface="Segoe UI"/>
               </a:rPr>
               <a:t>0x2A</a:t>
             </a:r>
@@ -7473,14 +7500,32 @@
                 </a:solidFill>
                 <a:latin typeface="Segoe UI"/>
               </a:rPr>
-              <a:t> **مستحيلة** (لهذا صارت </a:t>
+              <a:t> </a:t>
             </a:r>
             <a:r>
               <a:rPr sz="1300" b="1" lang="ar-SA" algn="r">
                 <a:solidFill>
+                  <a:srgbClr val="1A202A"/>
+                </a:solidFill>
+                <a:latin typeface="Segoe UI"/>
+              </a:rPr>
+              <a:t>مستحيلة</a:t>
+            </a:r>
+            <a:r>
+              <a:rPr sz="1300" b="0" lang="ar-SA" algn="r">
+                <a:solidFill>
+                  <a:srgbClr val="1A202A"/>
+                </a:solidFill>
+                <a:latin typeface="Segoe UI"/>
+              </a:rPr>
+              <a:t> (لهذا صارت </a:t>
+            </a:r>
+            <a:r>
+              <a:rPr sz="1300" b="1" lang="ar-SA" algn="r">
+                <a:solidFill>
                   <a:srgbClr val="8A5F0A"/>
                 </a:solidFill>
-                <a:latin typeface="Consolas"/>
+                <a:latin typeface="Segoe UI"/>
               </a:rPr>
               <a:t>0x0A</a:t>
             </a:r>
@@ -8862,7 +8907,34 @@
                 </a:solidFill>
                 <a:latin typeface="Segoe UI"/>
               </a:rPr>
-              <a:t>exe أحادي الملف · بحث في `MizanPro.exe` · `bp Namespace.Method`</a:t>
+              <a:t>exe أحادي الملف · بحث في </a:t>
+            </a:r>
+            <a:r>
+              <a:rPr sz="1350" b="1" lang="ar-SA" algn="r">
+                <a:solidFill>
+                  <a:srgbClr val="8A5F0A"/>
+                </a:solidFill>
+                <a:latin typeface="Consolas"/>
+              </a:rPr>
+              <a:t>MizanPro.exe</a:t>
+            </a:r>
+            <a:r>
+              <a:rPr sz="1350" b="0" lang="ar-SA" algn="r">
+                <a:solidFill>
+                  <a:srgbClr val="1A202A"/>
+                </a:solidFill>
+                <a:latin typeface="Segoe UI"/>
+              </a:rPr>
+              <a:t> · </a:t>
+            </a:r>
+            <a:r>
+              <a:rPr sz="1350" b="1" lang="ar-SA" algn="r">
+                <a:solidFill>
+                  <a:srgbClr val="8A5F0A"/>
+                </a:solidFill>
+                <a:latin typeface="Consolas"/>
+              </a:rPr>
+              <a:t>bp Namespace.Method</a:t>
             </a:r>
           </a:p>
         </p:txBody>
@@ -9452,20 +9524,29 @@
               <a:t>•  </a:t>
             </a:r>
             <a:r>
+              <a:rPr sz="1350" b="1" lang="ar-SA" algn="r">
+                <a:solidFill>
+                  <a:srgbClr val="1A202A"/>
+                </a:solidFill>
+                <a:latin typeface="Segoe UI"/>
+              </a:rPr>
+              <a:t>جذر ١</a:t>
+            </a:r>
+            <a:r>
               <a:rPr sz="1350" b="0" lang="ar-SA" algn="r">
                 <a:solidFill>
                   <a:srgbClr val="1A202A"/>
                 </a:solidFill>
                 <a:latin typeface="Segoe UI"/>
               </a:rPr>
-              <a:t>**جذر ١**: أحداث XAML تعمل أثناء </a:t>
+              <a:t>: أحداث XAML تعمل أثناء </a:t>
             </a:r>
             <a:r>
               <a:rPr sz="1350" b="1" lang="ar-SA" algn="r">
                 <a:solidFill>
                   <a:srgbClr val="8A5F0A"/>
                 </a:solidFill>
-                <a:latin typeface="Consolas"/>
+                <a:latin typeface="Segoe UI"/>
               </a:rPr>
               <a:t>InitializeComponent</a:t>
             </a:r>
@@ -9483,7 +9564,7 @@
                 <a:solidFill>
                   <a:srgbClr val="8A5F0A"/>
                 </a:solidFill>
-                <a:latin typeface="Consolas"/>
+                <a:latin typeface="Segoe UI"/>
               </a:rPr>
               <a:t>NullReferenceException</a:t>
             </a:r>
@@ -9548,7 +9629,7 @@
                 <a:solidFill>
                   <a:srgbClr val="8A5F0A"/>
                 </a:solidFill>
-                <a:latin typeface="Consolas"/>
+                <a:latin typeface="Segoe UI"/>
               </a:rPr>
               <a:t>_loading</a:t>
             </a:r>
@@ -9627,20 +9708,29 @@
               <a:t>•  </a:t>
             </a:r>
             <a:r>
+              <a:rPr sz="1350" b="1" lang="ar-SA" algn="r">
+                <a:solidFill>
+                  <a:srgbClr val="1A202A"/>
+                </a:solidFill>
+                <a:latin typeface="Segoe UI"/>
+              </a:rPr>
+              <a:t>جذر ٢</a:t>
+            </a:r>
+            <a:r>
               <a:rPr sz="1350" b="0" lang="ar-SA" algn="r">
                 <a:solidFill>
                   <a:srgbClr val="1A202A"/>
                 </a:solidFill>
                 <a:latin typeface="Segoe UI"/>
               </a:rPr>
-              <a:t>**جذر ٢**: مع </a:t>
+              <a:t>: مع </a:t>
             </a:r>
             <a:r>
               <a:rPr sz="1350" b="1" lang="ar-SA" algn="r">
                 <a:solidFill>
                   <a:srgbClr val="8A5F0A"/>
                 </a:solidFill>
-                <a:latin typeface="Consolas"/>
+                <a:latin typeface="Segoe UI"/>
               </a:rPr>
               <a:t>RightToLeft</a:t>
             </a:r>
@@ -9658,7 +9748,7 @@
                 <a:solidFill>
                   <a:srgbClr val="8A5F0A"/>
                 </a:solidFill>
-                <a:latin typeface="Consolas"/>
+                <a:latin typeface="Segoe UI"/>
               </a:rPr>
               <a:t>HorizontalAlignment="Left"</a:t>
             </a:r>
@@ -9750,7 +9840,7 @@
                 <a:solidFill>
                   <a:srgbClr val="8A5F0A"/>
                 </a:solidFill>
-                <a:latin typeface="Consolas"/>
+                <a:latin typeface="Segoe UI"/>
               </a:rPr>
               <a:t>Select a date</a:t>
             </a:r>
@@ -9991,7 +10081,7 @@
                 <a:solidFill>
                   <a:srgbClr val="8A5F0A"/>
                 </a:solidFill>
-                <a:latin typeface="Consolas"/>
+                <a:latin typeface="Segoe UI"/>
               </a:rPr>
               <a:t>AUDIT_AND_FIXES.md</a:t>
             </a:r>
@@ -10571,7 +10661,25 @@
                 </a:solidFill>
                 <a:latin typeface="Segoe UI"/>
               </a:rPr>
-              <a:t>توقيع ECDSA على `{key|HWID|expiry}` بمفتاح البائع</a:t>
+              <a:t>توقيع ECDSA على </a:t>
+            </a:r>
+            <a:r>
+              <a:rPr sz="1250" b="1" lang="ar-SA" algn="r">
+                <a:solidFill>
+                  <a:srgbClr val="8A5F0A"/>
+                </a:solidFill>
+                <a:latin typeface="Consolas"/>
+              </a:rPr>
+              <a:t>{key|HWID|expiry}</a:t>
+            </a:r>
+            <a:r>
+              <a:rPr sz="1250" b="0" lang="ar-SA" algn="r">
+                <a:solidFill>
+                  <a:srgbClr val="1A202A"/>
+                </a:solidFill>
+                <a:latin typeface="Segoe UI"/>
+              </a:rPr>
+              <a:t> بمفتاح البائع</a:t>
             </a:r>
           </a:p>
         </p:txBody>
@@ -10701,7 +10809,25 @@
                 </a:solidFill>
                 <a:latin typeface="Segoe UI"/>
               </a:rPr>
-              <a:t>قرار `bool` في دالة واحدة</a:t>
+              <a:t>قرار </a:t>
+            </a:r>
+            <a:r>
+              <a:rPr sz="1250" b="1" lang="ar-SA" algn="r">
+                <a:solidFill>
+                  <a:srgbClr val="8A5F0A"/>
+                </a:solidFill>
+                <a:latin typeface="Consolas"/>
+              </a:rPr>
+              <a:t>bool</a:t>
+            </a:r>
+            <a:r>
+              <a:rPr sz="1250" b="0" lang="ar-SA" algn="r">
+                <a:solidFill>
+                  <a:srgbClr val="0B1D34"/>
+                </a:solidFill>
+                <a:latin typeface="Segoe UI"/>
+              </a:rPr>
+              <a:t> في دالة واحدة</a:t>
             </a:r>
           </a:p>
         </p:txBody>
@@ -10743,7 +10869,34 @@
                 </a:solidFill>
                 <a:latin typeface="Segoe UI"/>
               </a:rPr>
-              <a:t>أعِد **مفتاح تشفير وظيفة** بدل `true/false`</a:t>
+              <a:t>أعِد </a:t>
+            </a:r>
+            <a:r>
+              <a:rPr sz="1250" b="1" lang="ar-SA" algn="r">
+                <a:solidFill>
+                  <a:srgbClr val="1A202A"/>
+                </a:solidFill>
+                <a:latin typeface="Segoe UI"/>
+              </a:rPr>
+              <a:t>مفتاح تشفير وظيفة</a:t>
+            </a:r>
+            <a:r>
+              <a:rPr sz="1250" b="0" lang="ar-SA" algn="r">
+                <a:solidFill>
+                  <a:srgbClr val="1A202A"/>
+                </a:solidFill>
+                <a:latin typeface="Segoe UI"/>
+              </a:rPr>
+              <a:t> بدل </a:t>
+            </a:r>
+            <a:r>
+              <a:rPr sz="1250" b="1" lang="ar-SA" algn="r">
+                <a:solidFill>
+                  <a:srgbClr val="8A5F0A"/>
+                </a:solidFill>
+                <a:latin typeface="Consolas"/>
+              </a:rPr>
+              <a:t>true/false</a:t>
             </a:r>
           </a:p>
         </p:txBody>
@@ -10873,7 +11026,16 @@
                 </a:solidFill>
                 <a:latin typeface="Segoe UI"/>
               </a:rPr>
-              <a:t>حالة قابلة للتحرير في `HKCU`</a:t>
+              <a:t>حالة قابلة للتحرير في </a:t>
+            </a:r>
+            <a:r>
+              <a:rPr sz="1250" b="1" lang="ar-SA" algn="r">
+                <a:solidFill>
+                  <a:srgbClr val="8A5F0A"/>
+                </a:solidFill>
+                <a:latin typeface="Consolas"/>
+              </a:rPr>
+              <a:t>HKCU</a:t>
             </a:r>
           </a:p>
         </p:txBody>
@@ -10915,7 +11077,25 @@
                 </a:solidFill>
                 <a:latin typeface="Segoe UI"/>
               </a:rPr>
-              <a:t>DPAPI (`ProtectedData`) + HMAC + عدّاد مضاد للتراجع</a:t>
+              <a:t>DPAPI (</a:t>
+            </a:r>
+            <a:r>
+              <a:rPr sz="1250" b="1" lang="ar-SA" algn="r">
+                <a:solidFill>
+                  <a:srgbClr val="8A5F0A"/>
+                </a:solidFill>
+                <a:latin typeface="Consolas"/>
+              </a:rPr>
+              <a:t>ProtectedData</a:t>
+            </a:r>
+            <a:r>
+              <a:rPr sz="1250" b="0" lang="ar-SA" algn="r">
+                <a:solidFill>
+                  <a:srgbClr val="1A202A"/>
+                </a:solidFill>
+                <a:latin typeface="Segoe UI"/>
+              </a:rPr>
+              <a:t>) + HMAC + عدّاد مضاد للتراجع</a:t>
             </a:r>
           </a:p>
         </p:txBody>
@@ -11211,13 +11391,22 @@
               </a:spcAft>
             </a:pPr>
             <a:r>
+              <a:rPr sz="1250" b="1" lang="ar-SA" algn="r">
+                <a:solidFill>
+                  <a:srgbClr val="8A5F0A"/>
+                </a:solidFill>
+                <a:latin typeface="Consolas"/>
+              </a:rPr>
+              <a:t>InstallDate</a:t>
+            </a:r>
+            <a:r>
               <a:rPr sz="1250" b="0" lang="ar-SA" algn="r">
                 <a:solidFill>
                   <a:srgbClr val="0B1D34"/>
                 </a:solidFill>
                 <a:latin typeface="Segoe UI"/>
               </a:rPr>
-              <a:t>`InstallDate` وحده</a:t>
+              <a:t> وحده</a:t>
             </a:r>
           </a:p>
         </p:txBody>
@@ -11253,13 +11442,31 @@
               </a:spcAft>
             </a:pPr>
             <a:r>
+              <a:rPr sz="1250" b="1" lang="ar-SA" algn="r">
+                <a:solidFill>
+                  <a:srgbClr val="8A5F0A"/>
+                </a:solidFill>
+                <a:latin typeface="Consolas"/>
+              </a:rPr>
+              <a:t>max(last_seen, now)</a:t>
+            </a:r>
+            <a:r>
               <a:rPr sz="1250" b="0" lang="ar-SA" algn="r">
                 <a:solidFill>
                   <a:srgbClr val="1A202A"/>
                 </a:solidFill>
                 <a:latin typeface="Segoe UI"/>
               </a:rPr>
-              <a:t>`max(last_seen, now)` في مكانين + `GetSystemTimePreciseAsFileTime`</a:t>
+              <a:t> في مكانين + </a:t>
+            </a:r>
+            <a:r>
+              <a:rPr sz="1250" b="1" lang="ar-SA" algn="r">
+                <a:solidFill>
+                  <a:srgbClr val="8A5F0A"/>
+                </a:solidFill>
+                <a:latin typeface="Consolas"/>
+              </a:rPr>
+              <a:t>GetSystemTimePreciseAsFileTime</a:t>
             </a:r>
           </a:p>
         </p:txBody>
@@ -11431,7 +11638,25 @@
                 </a:solidFill>
                 <a:latin typeface="Segoe UI"/>
               </a:rPr>
-              <a:t>Obfuscation + `PublishAot` (لا IL إطلاقاً ⇒ رتق الفصل 7 يستحيل)</a:t>
+              <a:t>Obfuscation + </a:t>
+            </a:r>
+            <a:r>
+              <a:rPr sz="1250" b="1" lang="ar-SA" algn="r">
+                <a:solidFill>
+                  <a:srgbClr val="8A5F0A"/>
+                </a:solidFill>
+                <a:latin typeface="Consolas"/>
+              </a:rPr>
+              <a:t>PublishAot</a:t>
+            </a:r>
+            <a:r>
+              <a:rPr sz="1250" b="0" lang="ar-SA" algn="r">
+                <a:solidFill>
+                  <a:srgbClr val="1A202A"/>
+                </a:solidFill>
+                <a:latin typeface="Segoe UI"/>
+              </a:rPr>
+              <a:t> (لا IL إطلاقاً ⇒ رتق الفصل 7 يستحيل)</a:t>
             </a:r>
           </a:p>
         </p:txBody>
@@ -11597,13 +11822,22 @@
               </a:spcAft>
             </a:pPr>
             <a:r>
+              <a:rPr sz="1250" b="1" lang="ar-SA" algn="r">
+                <a:solidFill>
+                  <a:srgbClr val="8A5F0A"/>
+                </a:solidFill>
+                <a:latin typeface="Consolas"/>
+              </a:rPr>
+              <a:t>SHA256</a:t>
+            </a:r>
+            <a:r>
               <a:rPr sz="1250" b="0" lang="ar-SA" algn="r">
                 <a:solidFill>
                   <a:srgbClr val="1A202A"/>
                 </a:solidFill>
                 <a:latin typeface="Segoe UI"/>
               </a:rPr>
-              <a:t>`SHA256` للحزمة + تجاهل الوظائف الحرجة عند الاختلاف</a:t>
+              <a:t> للحزمة + تجاهل الوظائف الحرجة عند الاختلاف</a:t>
             </a:r>
           </a:p>
         </p:txBody>
@@ -11705,7 +11939,43 @@
                 </a:solidFill>
                 <a:latin typeface="Segoe UI"/>
               </a:rPr>
-              <a:t>تحذير: `PublishAot` يلغي `System.Management` (WMI) في .NET 6 — البصمة تحتاج P/Invoke.</a:t>
+              <a:t>تحذير: </a:t>
+            </a:r>
+            <a:r>
+              <a:rPr sz="1350" b="1" lang="ar-SA" algn="r">
+                <a:solidFill>
+                  <a:srgbClr val="B82424"/>
+                </a:solidFill>
+                <a:latin typeface="Consolas"/>
+              </a:rPr>
+              <a:t>PublishAot</a:t>
+            </a:r>
+            <a:r>
+              <a:rPr sz="1350" b="1" lang="ar-SA" algn="r">
+                <a:solidFill>
+                  <a:srgbClr val="B82424"/>
+                </a:solidFill>
+                <a:latin typeface="Segoe UI"/>
+              </a:rPr>
+              <a:t> يلغي </a:t>
+            </a:r>
+            <a:r>
+              <a:rPr sz="1350" b="1" lang="ar-SA" algn="r">
+                <a:solidFill>
+                  <a:srgbClr val="B82424"/>
+                </a:solidFill>
+                <a:latin typeface="Consolas"/>
+              </a:rPr>
+              <a:t>System.Management</a:t>
+            </a:r>
+            <a:r>
+              <a:rPr sz="1350" b="1" lang="ar-SA" algn="r">
+                <a:solidFill>
+                  <a:srgbClr val="B82424"/>
+                </a:solidFill>
+                <a:latin typeface="Segoe UI"/>
+              </a:rPr>
+              <a:t> (WMI) في .NET 6 — البصمة تحتاج P/Invoke.</a:t>
             </a:r>
           </a:p>
         </p:txBody>
@@ -14594,7 +14864,16 @@
                 </a:solidFill>
                 <a:latin typeface="Segoe UI"/>
               </a:rPr>
-              <a:t>x32dbg — Patches تعرض `1F 01 D0`</a:t>
+              <a:t>x32dbg — Patches تعرض </a:t>
+            </a:r>
+            <a:r>
+              <a:rPr sz="1350" b="1" lang="ar-SA" algn="r">
+                <a:solidFill>
+                  <a:srgbClr val="8A5F0A"/>
+                </a:solidFill>
+                <a:latin typeface="Consolas"/>
+              </a:rPr>
+              <a:t>1F 01 D0</a:t>
             </a:r>
           </a:p>
         </p:txBody>
@@ -14808,7 +15087,25 @@
                 </a:solidFill>
                 <a:latin typeface="Segoe UI"/>
               </a:rPr>
-              <a:t>نفس المفتاح `5NOFK-…` الذي رُفِض قبل دقيقتين</a:t>
+              <a:t>نفس المفتاح </a:t>
+            </a:r>
+            <a:r>
+              <a:rPr sz="1200" b="1" lang="ar-SA" algn="r">
+                <a:solidFill>
+                  <a:srgbClr val="8A5F0A"/>
+                </a:solidFill>
+                <a:latin typeface="Consolas"/>
+              </a:rPr>
+              <a:t>5NOFK-…</a:t>
+            </a:r>
+            <a:r>
+              <a:rPr sz="1200" b="0" lang="ar-SA" algn="r">
+                <a:solidFill>
+                  <a:srgbClr val="6C7C8C"/>
+                </a:solidFill>
+                <a:latin typeface="Segoe UI"/>
+              </a:rPr>
+              <a:t> الذي رُفِض قبل دقيقتين</a:t>
             </a:r>
           </a:p>
         </p:txBody>
@@ -14861,7 +15158,7 @@
                 </a:solidFill>
                 <a:latin typeface="Segoe UI"/>
               </a:rPr>
-              <a:t>مواعيد التصوير: بعد تنفيذ مهمتَي 1 و2 في `AUDIT_AND_FIXES.md` — وبنفس دقة 1920×1080 حتى لا تتغير القصاصات</a:t>
+              <a:t>مواعيد التصوير: بعد تنفيذ مهمتَي 1 و2 في AUDIT_AND_FIXES.md — وبنفس دقة 1920×1080 حتى لا تتغير القصاصات</a:t>
             </a:r>
           </a:p>
         </p:txBody>
@@ -16180,7 +16477,25 @@
                 </a:solidFill>
                 <a:latin typeface="Segoe UI"/>
               </a:rPr>
-              <a:t>كسر الحماية **أو** تحليل سلوكي</a:t>
+              <a:t>كسر الحماية </a:t>
+            </a:r>
+            <a:r>
+              <a:rPr sz="1350" b="1" lang="ar-SA" algn="r">
+                <a:solidFill>
+                  <a:srgbClr val="0B1D34"/>
+                </a:solidFill>
+                <a:latin typeface="Segoe UI"/>
+              </a:rPr>
+              <a:t>أو</a:t>
+            </a:r>
+            <a:r>
+              <a:rPr sz="1350" b="0" lang="ar-SA" algn="r">
+                <a:solidFill>
+                  <a:srgbClr val="0B1D34"/>
+                </a:solidFill>
+                <a:latin typeface="Segoe UI"/>
+              </a:rPr>
+              <a:t> تحليل سلوكي</a:t>
             </a:r>
           </a:p>
         </p:txBody>
@@ -16924,14 +17239,32 @@
                 </a:solidFill>
                 <a:latin typeface="Segoe UI"/>
               </a:rPr>
-              <a:t>طبقة 1 — **مفتاح ترخيص**: 20 محرفاً </a:t>
+              <a:t>طبقة 1 — </a:t>
             </a:r>
             <a:r>
               <a:rPr sz="1550" b="1" lang="ar-SA" algn="r">
                 <a:solidFill>
+                  <a:srgbClr val="1A202A"/>
+                </a:solidFill>
+                <a:latin typeface="Segoe UI"/>
+              </a:rPr>
+              <a:t>مفتاح ترخيص</a:t>
+            </a:r>
+            <a:r>
+              <a:rPr sz="1550" b="0" lang="ar-SA" algn="r">
+                <a:solidFill>
+                  <a:srgbClr val="1A202A"/>
+                </a:solidFill>
+                <a:latin typeface="Segoe UI"/>
+              </a:rPr>
+              <a:t>: 20 محرفاً </a:t>
+            </a:r>
+            <a:r>
+              <a:rPr sz="1550" b="1" lang="ar-SA" algn="r">
+                <a:solidFill>
                   <a:srgbClr val="8A5F0A"/>
                 </a:solidFill>
-                <a:latin typeface="Consolas"/>
+                <a:latin typeface="Segoe UI"/>
               </a:rPr>
               <a:t>[A-Z0-9]</a:t>
             </a:r>
@@ -16970,14 +17303,32 @@
                 </a:solidFill>
                 <a:latin typeface="Segoe UI"/>
               </a:rPr>
-              <a:t>طبقة 2 — **حالة مخزَّنة** في </a:t>
+              <a:t>طبقة 2 — </a:t>
             </a:r>
             <a:r>
               <a:rPr sz="1550" b="1" lang="ar-SA" algn="r">
                 <a:solidFill>
+                  <a:srgbClr val="1A202A"/>
+                </a:solidFill>
+                <a:latin typeface="Segoe UI"/>
+              </a:rPr>
+              <a:t>حالة مخزَّنة</a:t>
+            </a:r>
+            <a:r>
+              <a:rPr sz="1550" b="0" lang="ar-SA" algn="r">
+                <a:solidFill>
+                  <a:srgbClr val="1A202A"/>
+                </a:solidFill>
+                <a:latin typeface="Segoe UI"/>
+              </a:rPr>
+              <a:t> في </a:t>
+            </a:r>
+            <a:r>
+              <a:rPr sz="1550" b="1" lang="ar-SA" algn="r">
+                <a:solidFill>
                   <a:srgbClr val="8A5F0A"/>
                 </a:solidFill>
-                <a:latin typeface="Consolas"/>
+                <a:latin typeface="Segoe UI"/>
               </a:rPr>
               <a:t>HKCU\…\RuntimeState</a:t>
             </a:r>
@@ -17007,14 +17358,32 @@
                 </a:solidFill>
                 <a:latin typeface="Segoe UI"/>
               </a:rPr>
-              <a:t>طبقة 3 — **ملف احتياطي** </a:t>
+              <a:t>طبقة 3 — </a:t>
             </a:r>
             <a:r>
               <a:rPr sz="1550" b="1" lang="ar-SA" algn="r">
                 <a:solidFill>
+                  <a:srgbClr val="1A202A"/>
+                </a:solidFill>
+                <a:latin typeface="Segoe UI"/>
+              </a:rPr>
+              <a:t>ملف احتياطي</a:t>
+            </a:r>
+            <a:r>
+              <a:rPr sz="1550" b="0" lang="ar-SA" algn="r">
+                <a:solidFill>
+                  <a:srgbClr val="1A202A"/>
+                </a:solidFill>
+                <a:latin typeface="Segoe UI"/>
+              </a:rPr>
+              <a:t> </a:t>
+            </a:r>
+            <a:r>
+              <a:rPr sz="1550" b="1" lang="ar-SA" algn="r">
+                <a:solidFill>
                   <a:srgbClr val="8A5F0A"/>
                 </a:solidFill>
-                <a:latin typeface="Consolas"/>
+                <a:latin typeface="Segoe UI"/>
               </a:rPr>
               <a:t>state.enc</a:t>
             </a:r>
@@ -17060,7 +17429,7 @@
                 <a:solidFill>
                   <a:srgbClr val="8A5F0A"/>
                 </a:solidFill>
-                <a:latin typeface="Consolas"/>
+                <a:latin typeface="Segoe UI"/>
               </a:rPr>
               <a:t>InstallDate</a:t>
             </a:r>
@@ -18209,20 +18578,29 @@
               <a:t>•  </a:t>
             </a:r>
             <a:r>
+              <a:rPr sz="1500" b="1" lang="ar-SA" algn="r">
+                <a:solidFill>
+                  <a:srgbClr val="1A202A"/>
+                </a:solidFill>
+                <a:latin typeface="Segoe UI"/>
+              </a:rPr>
+              <a:t>قرار واحد</a:t>
+            </a:r>
+            <a:r>
               <a:rPr sz="1500" b="0" lang="ar-SA" algn="r">
                 <a:solidFill>
                   <a:srgbClr val="1A202A"/>
                 </a:solidFill>
                 <a:latin typeface="Segoe UI"/>
               </a:rPr>
-              <a:t>**قرار واحد** في </a:t>
+              <a:t> في </a:t>
             </a:r>
             <a:r>
               <a:rPr sz="1500" b="1" lang="ar-SA" algn="r">
                 <a:solidFill>
                   <a:srgbClr val="8A5F0A"/>
                 </a:solidFill>
-                <a:latin typeface="Consolas"/>
+                <a:latin typeface="Segoe UI"/>
               </a:rPr>
               <a:t>ParseAndVerify</a:t>
             </a:r>
@@ -18907,7 +19285,16 @@
                 </a:solidFill>
                 <a:latin typeface="Segoe UI"/>
               </a:rPr>
-              <a:t>نقاط توقف، ذاكرة، سجلات، رتق بايتات — **يرى ما ينفّذه المعالج**</a:t>
+              <a:t>نقاط توقف، ذاكرة، سجلات، رتق بايتات — </a:t>
+            </a:r>
+            <a:r>
+              <a:rPr sz="1450" b="1" lang="ar-SA" algn="r">
+                <a:solidFill>
+                  <a:srgbClr val="1A202A"/>
+                </a:solidFill>
+                <a:latin typeface="Segoe UI"/>
+              </a:rPr>
+              <a:t>يرى ما ينفّذه المعالج</a:t>
             </a:r>
           </a:p>
         </p:txBody>
@@ -19603,7 +19990,25 @@
                 </a:solidFill>
                 <a:latin typeface="Segoe UI"/>
               </a:rPr>
-              <a:t>AES-CBC لتزوير `state.enc`، ومولّد المفاتيح</a:t>
+              <a:t>AES-CBC لتزوير </a:t>
+            </a:r>
+            <a:r>
+              <a:rPr sz="1450" b="1" lang="ar-SA" algn="r">
+                <a:solidFill>
+                  <a:srgbClr val="8A5F0A"/>
+                </a:solidFill>
+                <a:latin typeface="Consolas"/>
+              </a:rPr>
+              <a:t>state.enc</a:t>
+            </a:r>
+            <a:r>
+              <a:rPr sz="1450" b="0" lang="ar-SA" algn="r">
+                <a:solidFill>
+                  <a:srgbClr val="1A202A"/>
+                </a:solidFill>
+                <a:latin typeface="Segoe UI"/>
+              </a:rPr>
+              <a:t>، ومولّد المفاتيح</a:t>
             </a:r>
           </a:p>
         </p:txBody>
@@ -19990,14 +20395,32 @@
                 </a:solidFill>
                 <a:latin typeface="Segoe UI"/>
               </a:rPr>
-              <a:t>C# ← **IL** داخل </a:t>
+              <a:t>C# ← </a:t>
             </a:r>
             <a:r>
               <a:rPr sz="1650" b="1" lang="ar-SA" algn="r">
                 <a:solidFill>
+                  <a:srgbClr val="1A202A"/>
+                </a:solidFill>
+                <a:latin typeface="Segoe UI"/>
+              </a:rPr>
+              <a:t>IL</a:t>
+            </a:r>
+            <a:r>
+              <a:rPr sz="1650" b="0" lang="ar-SA" algn="r">
+                <a:solidFill>
+                  <a:srgbClr val="1A202A"/>
+                </a:solidFill>
+                <a:latin typeface="Segoe UI"/>
+              </a:rPr>
+              <a:t> داخل </a:t>
+            </a:r>
+            <a:r>
+              <a:rPr sz="1650" b="1" lang="ar-SA" algn="r">
+                <a:solidFill>
                   <a:srgbClr val="8A5F0A"/>
                 </a:solidFill>
-                <a:latin typeface="Consolas"/>
+                <a:latin typeface="Segoe UI"/>
               </a:rPr>
               <a:t>MizanPro.dll</a:t>
             </a:r>
@@ -20052,7 +20475,7 @@
                 <a:solidFill>
                   <a:srgbClr val="8A5F0A"/>
                 </a:solidFill>
-                <a:latin typeface="Consolas"/>
+                <a:latin typeface="Segoe UI"/>
               </a:rPr>
               <a:t>TieredCompilation</a:t>
             </a:r>
@@ -20262,7 +20685,25 @@
                 </a:solidFill>
                 <a:latin typeface="Segoe UI"/>
               </a:rPr>
-              <a:t>① نشر بلا ملف واحد → `MizanPro.dll` موجود</a:t>
+              <a:t>① نشر بلا ملف واحد → </a:t>
+            </a:r>
+            <a:r>
+              <a:rPr sz="1350" b="1" lang="ar-SA" algn="r">
+                <a:solidFill>
+                  <a:srgbClr val="8A5F0A"/>
+                </a:solidFill>
+                <a:latin typeface="Consolas"/>
+              </a:rPr>
+              <a:t>MizanPro.dll</a:t>
+            </a:r>
+            <a:r>
+              <a:rPr sz="1350" b="0" lang="ar-SA" algn="r">
+                <a:solidFill>
+                  <a:srgbClr val="0B1D34"/>
+                </a:solidFill>
+                <a:latin typeface="Segoe UI"/>
+              </a:rPr>
+              <a:t> موجود</a:t>
             </a:r>
           </a:p>
         </p:txBody>
@@ -20304,7 +20745,25 @@
                 </a:solidFill>
                 <a:latin typeface="Segoe UI"/>
               </a:rPr>
-              <a:t>② F3: تشغيل `MizanPro.exe` تحت x32dbg</a:t>
+              <a:t>② F3: تشغيل </a:t>
+            </a:r>
+            <a:r>
+              <a:rPr sz="1350" b="1" lang="ar-SA" algn="r">
+                <a:solidFill>
+                  <a:srgbClr val="8A5F0A"/>
+                </a:solidFill>
+                <a:latin typeface="Consolas"/>
+              </a:rPr>
+              <a:t>MizanPro.exe</a:t>
+            </a:r>
+            <a:r>
+              <a:rPr sz="1350" b="0" lang="ar-SA" algn="r">
+                <a:solidFill>
+                  <a:srgbClr val="0B1D34"/>
+                </a:solidFill>
+                <a:latin typeface="Segoe UI"/>
+              </a:rPr>
+              <a:t> تحت x32dbg</a:t>
             </a:r>
           </a:p>
         </p:txBody>
@@ -20388,7 +20847,34 @@
                 </a:solidFill>
                 <a:latin typeface="Segoe UI"/>
               </a:rPr>
-              <a:t>④ Alt+M → `MizanPro.dll` → Ctrl+B → `1F 49 D0`</a:t>
+              <a:t>④ Alt+M → </a:t>
+            </a:r>
+            <a:r>
+              <a:rPr sz="1350" b="1" lang="ar-SA" algn="r">
+                <a:solidFill>
+                  <a:srgbClr val="8A5F0A"/>
+                </a:solidFill>
+                <a:latin typeface="Consolas"/>
+              </a:rPr>
+              <a:t>MizanPro.dll</a:t>
+            </a:r>
+            <a:r>
+              <a:rPr sz="1350" b="0" lang="ar-SA" algn="r">
+                <a:solidFill>
+                  <a:srgbClr val="0B1D34"/>
+                </a:solidFill>
+                <a:latin typeface="Segoe UI"/>
+              </a:rPr>
+              <a:t> → Ctrl+B → </a:t>
+            </a:r>
+            <a:r>
+              <a:rPr sz="1350" b="1" lang="ar-SA" algn="r">
+                <a:solidFill>
+                  <a:srgbClr val="8A5F0A"/>
+                </a:solidFill>
+                <a:latin typeface="Consolas"/>
+              </a:rPr>
+              <a:t>1F 49 D0</a:t>
             </a:r>
           </a:p>
         </p:txBody>
@@ -20430,7 +20916,43 @@
                 </a:solidFill>
                 <a:latin typeface="Segoe UI"/>
               </a:rPr>
-              <a:t>⑤ Ctrl+E: غيّر `49` ← `01` (بايت واحد)</a:t>
+              <a:t>⑤ Ctrl+E: غيّر </a:t>
+            </a:r>
+            <a:r>
+              <a:rPr sz="1350" b="1" lang="ar-SA" algn="r">
+                <a:solidFill>
+                  <a:srgbClr val="8A5F0A"/>
+                </a:solidFill>
+                <a:latin typeface="Consolas"/>
+              </a:rPr>
+              <a:t>49</a:t>
+            </a:r>
+            <a:r>
+              <a:rPr sz="1350" b="0" lang="ar-SA" algn="r">
+                <a:solidFill>
+                  <a:srgbClr val="0B1D34"/>
+                </a:solidFill>
+                <a:latin typeface="Segoe UI"/>
+              </a:rPr>
+              <a:t> ← </a:t>
+            </a:r>
+            <a:r>
+              <a:rPr sz="1350" b="1" lang="ar-SA" algn="r">
+                <a:solidFill>
+                  <a:srgbClr val="8A5F0A"/>
+                </a:solidFill>
+                <a:latin typeface="Consolas"/>
+              </a:rPr>
+              <a:t>01</a:t>
+            </a:r>
+            <a:r>
+              <a:rPr sz="1350" b="0" lang="ar-SA" algn="r">
+                <a:solidFill>
+                  <a:srgbClr val="0B1D34"/>
+                </a:solidFill>
+                <a:latin typeface="Segoe UI"/>
+              </a:rPr>
+              <a:t> (بايت واحد)</a:t>
             </a:r>
           </a:p>
         </p:txBody>
@@ -20472,7 +20994,16 @@
                 </a:solidFill>
                 <a:latin typeface="Segoe UI"/>
               </a:rPr>
-              <a:t>⑥ F9 ← ثم الصق المفتاح «المُثبِت» ← **تم التفعيل**</a:t>
+              <a:t>⑥ F9 ← ثم الصق المفتاح «المُثبِت» ← </a:t>
+            </a:r>
+            <a:r>
+              <a:rPr sz="1350" b="1" lang="ar-SA" algn="r">
+                <a:solidFill>
+                  <a:srgbClr val="0B1D34"/>
+                </a:solidFill>
+                <a:latin typeface="Segoe UI"/>
+              </a:rPr>
+              <a:t>تم التفعيل</a:t>
             </a:r>
           </a:p>
         </p:txBody>
@@ -21083,7 +21614,7 @@
                 <a:solidFill>
                   <a:srgbClr val="8A5F0A"/>
                 </a:solidFill>
-                <a:latin typeface="Consolas"/>
+                <a:latin typeface="Segoe UI"/>
               </a:rPr>
               <a:t>state.enc</a:t>
             </a:r>
@@ -21101,7 +21632,7 @@
                 <a:solidFill>
                   <a:srgbClr val="8A5F0A"/>
                 </a:solidFill>
-                <a:latin typeface="Consolas"/>
+                <a:latin typeface="Segoe UI"/>
               </a:rPr>
               <a:t>Mizan2024_K3y128</a:t>
             </a:r>
@@ -21337,13 +21868,22 @@
               <a:t>الدليل (ب): </a:t>
             </a:r>
             <a:r>
+              <a:rPr sz="1250" b="1" lang="ar-SA" algn="r">
+                <a:solidFill>
+                  <a:srgbClr val="8A5F0A"/>
+                </a:solidFill>
+                <a:latin typeface="Consolas"/>
+              </a:rPr>
+              <a:t>reg query</a:t>
+            </a:r>
+            <a:r>
               <a:rPr sz="1250" b="0" lang="ar-SA" algn="r">
                 <a:solidFill>
                   <a:srgbClr val="1A202A"/>
                 </a:solidFill>
                 <a:latin typeface="Segoe UI"/>
               </a:rPr>
-              <a:t>`reg query` يُظهر القيمة؛ احذفها ← يعود الوضع التجريبي</a:t>
+              <a:t> يُظهر القيمة؛ احذفها ← يعود الوضع التجريبي</a:t>
             </a:r>
           </a:p>
         </p:txBody>
@@ -21586,7 +22126,25 @@
                 </a:solidFill>
                 <a:latin typeface="Segoe UI"/>
               </a:rPr>
-              <a:t>‏x32dbg داخل `MizanPro.dll`: بايت واحد</a:t>
+              <a:t>‏x32dbg داخل </a:t>
+            </a:r>
+            <a:r>
+              <a:rPr sz="3000" b="1" lang="ar-SA" algn="r">
+                <a:solidFill>
+                  <a:srgbClr val="8A5F0A"/>
+                </a:solidFill>
+                <a:latin typeface="Consolas"/>
+              </a:rPr>
+              <a:t>MizanPro.dll</a:t>
+            </a:r>
+            <a:r>
+              <a:rPr sz="3000" b="1" lang="ar-SA" algn="r">
+                <a:solidFill>
+                  <a:srgbClr val="0B1D34"/>
+                </a:solidFill>
+                <a:latin typeface="Segoe UI"/>
+              </a:rPr>
+              <a:t>: بايت واحد</a:t>
             </a:r>
           </a:p>
         </p:txBody>
@@ -21877,14 +22435,32 @@
                 </a:solidFill>
                 <a:latin typeface="Segoe UI"/>
               </a:rPr>
-              <a:t>نبحث **ثنائياً** عن </a:t>
+              <a:t>نبحث </a:t>
             </a:r>
             <a:r>
               <a:rPr sz="1500" b="1" lang="ar-SA" algn="r">
                 <a:solidFill>
+                  <a:srgbClr val="1A202A"/>
+                </a:solidFill>
+                <a:latin typeface="Segoe UI"/>
+              </a:rPr>
+              <a:t>ثنائياً</a:t>
+            </a:r>
+            <a:r>
+              <a:rPr sz="1500" b="0" lang="ar-SA" algn="r">
+                <a:solidFill>
+                  <a:srgbClr val="1A202A"/>
+                </a:solidFill>
+                <a:latin typeface="Segoe UI"/>
+              </a:rPr>
+              <a:t> عن </a:t>
+            </a:r>
+            <a:r>
+              <a:rPr sz="1500" b="1" lang="ar-SA" algn="r">
+                <a:solidFill>
                   <a:srgbClr val="8A5F0A"/>
                 </a:solidFill>
-                <a:latin typeface="Consolas"/>
+                <a:latin typeface="Segoe UI"/>
               </a:rPr>
               <a:t>1F 49 D0</a:t>
             </a:r>
@@ -21902,7 +22478,7 @@
                 <a:solidFill>
                   <a:srgbClr val="8A5F0A"/>
                 </a:solidFill>
-                <a:latin typeface="Consolas"/>
+                <a:latin typeface="Segoe UI"/>
               </a:rPr>
               <a:t>MizanPro.dll</a:t>
             </a:r>
@@ -22082,7 +22658,16 @@
                 </a:solidFill>
                 <a:latin typeface="Segoe UI"/>
               </a:rPr>
-              <a:t>F3 ← `MizanPro.exe`</a:t>
+              <a:t>F3 ← </a:t>
+            </a:r>
+            <a:r>
+              <a:rPr sz="1300" b="1" lang="ar-SA" algn="r">
+                <a:solidFill>
+                  <a:srgbClr val="8A5F0A"/>
+                </a:solidFill>
+                <a:latin typeface="Consolas"/>
+              </a:rPr>
+              <a:t>MizanPro.exe</a:t>
             </a:r>
           </a:p>
         </p:txBody>
@@ -22367,7 +22952,16 @@
                 </a:solidFill>
                 <a:latin typeface="Segoe UI"/>
               </a:rPr>
-              <a:t>Alt+M ← `MizanPro.dll`</a:t>
+              <a:t>Alt+M ← </a:t>
+            </a:r>
+            <a:r>
+              <a:rPr sz="1300" b="1" lang="ar-SA" algn="r">
+                <a:solidFill>
+                  <a:srgbClr val="8A5F0A"/>
+                </a:solidFill>
+                <a:latin typeface="Consolas"/>
+              </a:rPr>
+              <a:t>MizanPro.dll</a:t>
             </a:r>
           </a:p>
         </p:txBody>
@@ -22464,7 +23058,16 @@
                 </a:solidFill>
                 <a:latin typeface="Segoe UI"/>
               </a:rPr>
-              <a:t>Ctrl+B ← `1F 49 D0`</a:t>
+              <a:t>Ctrl+B ← </a:t>
+            </a:r>
+            <a:r>
+              <a:rPr sz="1300" b="1" lang="ar-SA" algn="r">
+                <a:solidFill>
+                  <a:srgbClr val="C59421"/>
+                </a:solidFill>
+                <a:latin typeface="Consolas"/>
+              </a:rPr>
+              <a:t>1F 49 D0</a:t>
             </a:r>
           </a:p>
         </p:txBody>
@@ -22561,7 +23164,34 @@
                 </a:solidFill>
                 <a:latin typeface="Segoe UI"/>
               </a:rPr>
-              <a:t>Ctrl+E ← `49`→`01`</a:t>
+              <a:t>Ctrl+E ← </a:t>
+            </a:r>
+            <a:r>
+              <a:rPr sz="1300" b="1" lang="ar-SA" algn="r">
+                <a:solidFill>
+                  <a:srgbClr val="C59421"/>
+                </a:solidFill>
+                <a:latin typeface="Consolas"/>
+              </a:rPr>
+              <a:t>49</a:t>
+            </a:r>
+            <a:r>
+              <a:rPr sz="1300" b="1" lang="ar-SA" algn="r">
+                <a:solidFill>
+                  <a:srgbClr val="FFFFFF"/>
+                </a:solidFill>
+                <a:latin typeface="Segoe UI"/>
+              </a:rPr>
+              <a:t>→</a:t>
+            </a:r>
+            <a:r>
+              <a:rPr sz="1300" b="1" lang="ar-SA" algn="r">
+                <a:solidFill>
+                  <a:srgbClr val="C59421"/>
+                </a:solidFill>
+                <a:latin typeface="Consolas"/>
+              </a:rPr>
+              <a:t>01</a:t>
             </a:r>
           </a:p>
         </p:txBody>
@@ -23201,7 +23831,25 @@
                 </a:solidFill>
                 <a:latin typeface="Segoe UI"/>
               </a:rPr>
-              <a:t>نفس المفتاح `5NOFK-…`
+              <a:t>نفس المفتاح </a:t>
+            </a:r>
+            <a:r>
+              <a:rPr sz="1300" b="1" lang="ar-SA" algn="r">
+                <a:solidFill>
+                  <a:srgbClr val="8A5F0A"/>
+                </a:solidFill>
+                <a:latin typeface="Consolas"/>
+              </a:rPr>
+              <a:t>5NOFK-…</a:t>
+            </a:r>
+            <a:r>
+              <a:rPr sz="1300" b="0" lang="ar-SA" algn="r">
+                <a:solidFill>
+                  <a:srgbClr val="1A202A"/>
+                </a:solidFill>
+                <a:latin typeface="Segoe UI"/>
+              </a:rPr>
+              <a:t>
 «مفتاح الترخيص غير صالح»</a:t>
             </a:r>
           </a:p>
@@ -23377,7 +24025,25 @@
                 <a:latin typeface="Segoe UI"/>
               </a:rPr>
               <a:t>«تم تفعيل ميزان Pro بنجاح!»
-اللافتة PRO + `ActivationBlob` كُتب</a:t>
+اللافتة PRO + </a:t>
+            </a:r>
+            <a:r>
+              <a:rPr sz="1300" b="1" lang="ar-SA" algn="r">
+                <a:solidFill>
+                  <a:srgbClr val="8A5F0A"/>
+                </a:solidFill>
+                <a:latin typeface="Consolas"/>
+              </a:rPr>
+              <a:t>ActivationBlob</a:t>
+            </a:r>
+            <a:r>
+              <a:rPr sz="1300" b="0" lang="ar-SA" algn="r">
+                <a:solidFill>
+                  <a:srgbClr val="1A202A"/>
+                </a:solidFill>
+                <a:latin typeface="Segoe UI"/>
+              </a:rPr>
+              <a:t> كُتب</a:t>
             </a:r>
           </a:p>
         </p:txBody>
@@ -23551,7 +24217,25 @@
                 </a:solidFill>
                 <a:latin typeface="Segoe UI"/>
               </a:rPr>
-              <a:t>نفس المفتاح **يُرفض** من جديد
+              <a:t>نفس المفتاح </a:t>
+            </a:r>
+            <a:r>
+              <a:rPr sz="1300" b="1" lang="ar-SA" algn="r">
+                <a:solidFill>
+                  <a:srgbClr val="1A202A"/>
+                </a:solidFill>
+                <a:latin typeface="Segoe UI"/>
+              </a:rPr>
+              <a:t>يُرفض</a:t>
+            </a:r>
+            <a:r>
+              <a:rPr sz="1300" b="0" lang="ar-SA" algn="r">
+                <a:solidFill>
+                  <a:srgbClr val="1A202A"/>
+                </a:solidFill>
+                <a:latin typeface="Segoe UI"/>
+              </a:rPr>
+              <a:t> من جديد
 (الملف على القرص لم يُمسّ)</a:t>
             </a:r>
           </a:p>
@@ -23649,7 +24333,25 @@
                 </a:solidFill>
                 <a:latin typeface="Segoe UI"/>
               </a:rPr>
-              <a:t>لأننا غيّرنا **معيار القبول** نفسه — أي مفتاح بنفس الصيغة صار مقبولاً، مع بقاء فحوص الطول والأبجدية تعمل. ولو سُئلت: «والمفتاح الطويل 21؟» ← ما زال مرفوضاً، وهذا يثبت أنك لم تُعطّل الدالة كلها.</a:t>
+              <a:t>لأننا غيّرنا </a:t>
+            </a:r>
+            <a:r>
+              <a:rPr sz="1450" b="1" lang="ar-SA" algn="r">
+                <a:solidFill>
+                  <a:srgbClr val="1A202A"/>
+                </a:solidFill>
+                <a:latin typeface="Segoe UI"/>
+              </a:rPr>
+              <a:t>معيار القبول</a:t>
+            </a:r>
+            <a:r>
+              <a:rPr sz="1450" b="0" lang="ar-SA" algn="r">
+                <a:solidFill>
+                  <a:srgbClr val="1A202A"/>
+                </a:solidFill>
+                <a:latin typeface="Segoe UI"/>
+              </a:rPr>
+              <a:t> نفسه — أي مفتاح بنفس الصيغة صار مقبولاً، مع بقاء فحوص الطول والأبجدية تعمل. ولو سُئلت: «والمفتاح الطويل 21؟» ← ما زال مرفوضاً، وهذا يثبت أنك لم تُعطّل الدالة كلها.</a:t>
             </a:r>
           </a:p>
         </p:txBody>
